--- a/public/fun/pack/pptx/talkpro/발표템플릿프리미엄_46_사업제안_로즈쿼츠.pptx
+++ b/public/fun/pack/pptx/talkpro/발표템플릿프리미엄_46_사업제안_로즈쿼츠.pptx
@@ -115,12 +115,12 @@
   <p:extLst>
     <p:ext uri="{521415D9-36F7-43E2-AB2F-B90AF26B5E84}">
       <p14:sectionLst xmlns:p14="http://schemas.microsoft.com/office/powerpoint/2010/main">
-        <p14:section name="시작" id="{2A59F8DB-A5ED-45FA-9C20-330C7D7A8A96}">
+        <p14:section name="시작" id="{D699A60D-B0D0-4980-8629-0A157D6E68BA}">
           <p14:sldIdLst>
             <p14:sldId id="256"/>
           </p14:sldIdLst>
         </p14:section>
-        <p14:section name="본문" id="{CC60E415-F2E0-42E5-A5EE-5CF240A3488E}">
+        <p14:section name="본문" id="{E82E95AB-3B35-4092-BE1B-20C12BF33F99}">
           <p14:sldIdLst>
             <p14:sldId id="257"/>
             <p14:sldId id="258"/>
@@ -131,7 +131,7 @@
             <p14:sldId id="263"/>
           </p14:sldIdLst>
         </p14:section>
-        <p14:section name="마무리" id="{F4D4BCE1-717B-4311-8B20-178B7C769260}">
+        <p14:section name="마무리" id="{0739CA4A-2F9F-4256-90B2-F7A5A201C4BF}">
           <p14:sldIdLst>
             <p14:sldId id="264"/>
           </p14:sldIdLst>
@@ -1843,7 +1843,7 @@
             </a:lvl1pPr>
           </a:lstStyle>
           <a:p>
-            <a:fld id="{EEB5B44B-57FC-4277-96CC-390DAB16F985}" type="slidenum">
+            <a:fld id="{D017B6FB-B526-4D12-8574-6FA4E8CCC715}" type="slidenum">
               <a:rPr lang="en-US"/>
               <a:t>‹#›</a:t>
             </a:fld>
@@ -2522,7 +2522,7 @@
             </a:lvl1pPr>
           </a:lstStyle>
           <a:p>
-            <a:fld id="{685637B8-8BCC-4BBA-B59B-B0E725E07045}" type="slidenum">
+            <a:fld id="{4C19F5D5-BA42-427C-981E-CE9DE0ECFA8F}" type="slidenum">
               <a:rPr lang="en-US"/>
               <a:t>‹#›</a:t>
             </a:fld>
@@ -3210,7 +3210,7 @@
             </a:lvl1pPr>
           </a:lstStyle>
           <a:p>
-            <a:fld id="{7ECB8058-990E-4242-84F0-A7102F2394C0}" type="slidenum">
+            <a:fld id="{3ACF91BB-C7B6-4050-A10D-21398D9D9991}" type="slidenum">
               <a:rPr lang="en-US"/>
               <a:t>‹#›</a:t>
             </a:fld>
@@ -4099,7 +4099,7 @@
           <a:p>
             <a:r>
               <a:rPr lang="ko-KR"/>
-              <a:t>새해 첫 분기에 시작할 안입니다</a:t>
+              <a:t>가장 먼저 시작할 안입니다</a:t>
             </a:r>
           </a:p>
         </p:txBody>
@@ -4127,7 +4127,7 @@
           <a:p>
             <a:r>
               <a:rPr lang="ko-KR"/>
-              <a:t>0000. 00. 00</a:t>
+              <a:t>날짜 입력</a:t>
             </a:r>
           </a:p>
         </p:txBody>
@@ -4212,7 +4212,7 @@
           <a:bodyPr/>
           <a:lstStyle/>
           <a:p>
-            <a:fld id="{27E53335-A41E-4FC6-A643-6D29FFFF2C2A}" type="slidenum">
+            <a:fld id="{57BAB325-7DA1-4F71-BED0-4C6A81DF436F}" type="slidenum">
               <a:rPr lang="en-US"/>
               <a:t>‹#›</a:t>
             </a:fld>
@@ -5414,7 +5414,7 @@
           <a:bodyPr/>
           <a:lstStyle/>
           <a:p>
-            <a:fld id="{B5BFF674-E6FD-4071-B84C-9DE308B74F4B}" type="slidenum">
+            <a:fld id="{C1344B9C-DB2A-40C5-8CE4-FB16C86B1427}" type="slidenum">
               <a:rPr lang="en-US"/>
               <a:t>‹#›</a:t>
             </a:fld>
@@ -5502,7 +5502,7 @@
           <a:bodyPr/>
           <a:lstStyle/>
           <a:p>
-            <a:fld id="{FAC10265-26F7-4BD7-B6DB-204CBC1B7A7A}" type="slidenum">
+            <a:fld id="{53A1584C-05B3-4F7C-84F8-DF5CBF57A8A3}" type="slidenum">
               <a:rPr lang="en-US"/>
               <a:t>‹#›</a:t>
             </a:fld>
@@ -6475,7 +6475,7 @@
           <a:bodyPr/>
           <a:lstStyle/>
           <a:p>
-            <a:fld id="{A8CBCD67-96CC-4E07-8562-9F7544D3FDEB}" type="slidenum">
+            <a:fld id="{51F142EA-F1C8-41AC-B62F-F05F7241B0FD}" type="slidenum">
               <a:rPr lang="en-US"/>
               <a:t>‹#›</a:t>
             </a:fld>
@@ -7123,7 +7123,7 @@
           <a:bodyPr/>
           <a:lstStyle/>
           <a:p>
-            <a:fld id="{A2F27804-CA36-4B05-8637-778D35872BF0}" type="slidenum">
+            <a:fld id="{B45DC5D8-4099-43AF-B0CF-AD2A5BF2040C}" type="slidenum">
               <a:rPr lang="en-US"/>
               <a:t>‹#›</a:t>
             </a:fld>
@@ -7306,7 +7306,7 @@
           <a:bodyPr/>
           <a:lstStyle/>
           <a:p>
-            <a:fld id="{AFC946AE-4296-496A-BD56-055C43BA5EDF}" type="slidenum">
+            <a:fld id="{B8AF0A22-9AA1-4FFC-BAAB-BB3C1F126222}" type="slidenum">
               <a:rPr lang="en-US"/>
               <a:t>‹#›</a:t>
             </a:fld>
@@ -8370,7 +8370,7 @@
           <a:bodyPr/>
           <a:lstStyle/>
           <a:p>
-            <a:fld id="{8FC2899E-973D-4C1F-B1DC-0A142CCFDBA0}" type="slidenum">
+            <a:fld id="{175761C2-65F7-4593-9916-8929AB3B561E}" type="slidenum">
               <a:rPr lang="en-US"/>
               <a:t>‹#›</a:t>
             </a:fld>
